--- a/Work/Web Programming with Python + AI/HTML and CSS/Other/HTML solo project/Presantation.pptx
+++ b/Work/Web Programming with Python + AI/HTML and CSS/Other/HTML solo project/Presantation.pptx
@@ -113,6 +113,11 @@
       </a:defRPr>
     </a:lvl9pPr>
   </p:defaultTextStyle>
+  <p:extLst>
+    <p:ext uri="{EFAFB233-063F-42B5-8137-9DF3F51BA10A}">
+      <p15:sldGuideLst xmlns:p15="http://schemas.microsoft.com/office/powerpoint/2012/main"/>
+    </p:ext>
+  </p:extLst>
 </p:presentation>
 </file>
 
@@ -269,7 +274,7 @@
           <a:p>
             <a:fld id="{C128FA71-3A18-48C0-980F-4B68F7F63042}" type="datetime1">
               <a:rPr lang="en-US" smtClean="0"/>
-              <a:t>3/9/26</a:t>
+              <a:t>3/13/26</a:t>
             </a:fld>
             <a:endParaRPr lang="en-US"/>
           </a:p>
@@ -477,7 +482,7 @@
           <a:p>
             <a:fld id="{7104EDB3-C0E8-45F8-9E1D-1B6C8D1880C0}" type="datetime1">
               <a:rPr lang="en-US" smtClean="0"/>
-              <a:t>3/9/26</a:t>
+              <a:t>3/13/26</a:t>
             </a:fld>
             <a:endParaRPr lang="en-US"/>
           </a:p>
@@ -687,7 +692,7 @@
           <a:p>
             <a:fld id="{9CF0EC4B-54ED-4041-B552-9BA760FA3DBA}" type="datetime1">
               <a:rPr lang="en-US" smtClean="0"/>
-              <a:t>3/9/26</a:t>
+              <a:t>3/13/26</a:t>
             </a:fld>
             <a:endParaRPr lang="en-US"/>
           </a:p>
@@ -885,7 +890,7 @@
           <a:p>
             <a:fld id="{51C1210E-201E-4473-82AC-2466F5386C38}" type="datetime1">
               <a:rPr lang="en-US" smtClean="0"/>
-              <a:t>3/9/26</a:t>
+              <a:t>3/13/26</a:t>
             </a:fld>
             <a:endParaRPr lang="en-US"/>
           </a:p>
@@ -1163,7 +1168,7 @@
           <a:p>
             <a:fld id="{B01EA198-6CAB-4B8F-B93F-1F9C8C4B6CE7}" type="datetime1">
               <a:rPr lang="en-US" smtClean="0"/>
-              <a:t>3/9/26</a:t>
+              <a:t>3/13/26</a:t>
             </a:fld>
             <a:endParaRPr lang="en-US"/>
           </a:p>
@@ -1435,7 +1440,7 @@
           <a:p>
             <a:fld id="{CA06041F-4525-44D5-AA4F-332294BF1F56}" type="datetime1">
               <a:rPr lang="en-US" smtClean="0"/>
-              <a:t>3/9/26</a:t>
+              <a:t>3/13/26</a:t>
             </a:fld>
             <a:endParaRPr lang="en-US"/>
           </a:p>
@@ -1859,7 +1864,7 @@
           <a:p>
             <a:fld id="{F9557091-BBDF-4EB9-BA6B-2BB67AC4FC0F}" type="datetime1">
               <a:rPr lang="en-US" smtClean="0"/>
-              <a:t>3/9/26</a:t>
+              <a:t>3/13/26</a:t>
             </a:fld>
             <a:endParaRPr lang="en-US"/>
           </a:p>
@@ -2000,7 +2005,7 @@
           <a:p>
             <a:fld id="{2D6B226B-77A6-410C-9796-083F278E0125}" type="datetime1">
               <a:rPr lang="en-US" smtClean="0"/>
-              <a:t>3/9/26</a:t>
+              <a:t>3/13/26</a:t>
             </a:fld>
             <a:endParaRPr lang="en-US"/>
           </a:p>
@@ -2113,7 +2118,7 @@
           <a:p>
             <a:fld id="{A23A578B-D289-4C40-8593-3D356C49DA58}" type="datetime1">
               <a:rPr lang="en-US" smtClean="0"/>
-              <a:t>3/9/26</a:t>
+              <a:t>3/13/26</a:t>
             </a:fld>
             <a:endParaRPr lang="en-US"/>
           </a:p>
@@ -2432,7 +2437,7 @@
           <a:p>
             <a:fld id="{713DFAE3-14DB-48A7-A80F-80DDB072CE3D}" type="datetime1">
               <a:rPr lang="en-US" smtClean="0"/>
-              <a:t>3/9/26</a:t>
+              <a:t>3/13/26</a:t>
             </a:fld>
             <a:endParaRPr lang="en-US"/>
           </a:p>
@@ -2726,7 +2731,7 @@
           <a:p>
             <a:fld id="{92C5EAEF-6478-4102-8F5D-A5FE9FC97ACB}" type="datetime1">
               <a:rPr lang="en-US" smtClean="0"/>
-              <a:t>3/9/26</a:t>
+              <a:t>3/13/26</a:t>
             </a:fld>
             <a:endParaRPr lang="en-US"/>
           </a:p>
@@ -2967,7 +2972,7 @@
           <a:p>
             <a:fld id="{67F45AC6-C491-4585-A584-9CE2AF7D5500}" type="datetime1">
               <a:rPr lang="en-US" smtClean="0"/>
-              <a:t>3/9/26</a:t>
+              <a:t>3/13/26</a:t>
             </a:fld>
             <a:endParaRPr lang="en-US"/>
           </a:p>
@@ -4449,20 +4454,12 @@
           </a:p>
           <a:p>
             <a:r>
-              <a:rPr lang="en-US" sz="2400" dirty="0" err="1">
-                <a:solidFill>
-                  <a:schemeClr val="bg1"/>
-                </a:solidFill>
-              </a:rPr>
-              <a:t>Artice</a:t>
-            </a:r>
-            <a:r>
               <a:rPr lang="en-US" sz="2400" dirty="0">
                 <a:solidFill>
                   <a:schemeClr val="bg1"/>
                 </a:solidFill>
               </a:rPr>
-              <a:t> – </a:t>
+              <a:t>Article – </a:t>
             </a:r>
             <a:r>
               <a:rPr lang="mk-MK" sz="2400" dirty="0">
@@ -5155,13 +5152,13 @@
   <p:clrMapOvr>
     <a:masterClrMapping/>
   </p:clrMapOvr>
-  <mc:AlternateContent xmlns:mc="http://schemas.openxmlformats.org/markup-compatibility/2006">
-    <mc:Choice xmlns:p14="http://schemas.microsoft.com/office/powerpoint/2010/main" Requires="p14">
+  <mc:AlternateContent xmlns:mc="http://schemas.openxmlformats.org/markup-compatibility/2006" xmlns:p14="http://schemas.microsoft.com/office/powerpoint/2010/main">
+    <mc:Choice Requires="p14">
       <p:transition spd="med" p14:dur="700">
         <p:fade/>
       </p:transition>
     </mc:Choice>
-    <mc:Fallback>
+    <mc:Fallback xmlns="">
       <p:transition spd="med">
         <p:fade/>
       </p:transition>
@@ -5804,13 +5801,13 @@
   <p:clrMapOvr>
     <a:masterClrMapping/>
   </p:clrMapOvr>
-  <mc:AlternateContent xmlns:mc="http://schemas.openxmlformats.org/markup-compatibility/2006">
-    <mc:Choice xmlns:p159="http://schemas.microsoft.com/office/powerpoint/2015/09/main" Requires="p159">
+  <mc:AlternateContent xmlns:mc="http://schemas.openxmlformats.org/markup-compatibility/2006" xmlns:p159="http://schemas.microsoft.com/office/powerpoint/2015/09/main">
+    <mc:Choice Requires="p159">
       <p:transition xmlns:p14="http://schemas.microsoft.com/office/powerpoint/2010/main" spd="slow" p14:dur="2000">
         <p159:morph option="byObject"/>
       </p:transition>
     </mc:Choice>
-    <mc:Fallback>
+    <mc:Fallback xmlns="">
       <p:transition spd="slow">
         <p:fade/>
       </p:transition>
@@ -6492,13 +6489,13 @@
   <p:clrMapOvr>
     <a:masterClrMapping/>
   </p:clrMapOvr>
-  <mc:AlternateContent xmlns:mc="http://schemas.openxmlformats.org/markup-compatibility/2006">
-    <mc:Choice xmlns:p159="http://schemas.microsoft.com/office/powerpoint/2015/09/main" Requires="p159">
+  <mc:AlternateContent xmlns:mc="http://schemas.openxmlformats.org/markup-compatibility/2006" xmlns:p159="http://schemas.microsoft.com/office/powerpoint/2015/09/main">
+    <mc:Choice Requires="p159">
       <p:transition xmlns:p14="http://schemas.microsoft.com/office/powerpoint/2010/main" spd="slow" p14:dur="2000">
         <p159:morph option="byObject"/>
       </p:transition>
     </mc:Choice>
-    <mc:Fallback>
+    <mc:Fallback xmlns="">
       <p:transition spd="slow">
         <p:fade/>
       </p:transition>
@@ -7159,13 +7156,13 @@
   <p:clrMapOvr>
     <a:masterClrMapping/>
   </p:clrMapOvr>
-  <mc:AlternateContent xmlns:mc="http://schemas.openxmlformats.org/markup-compatibility/2006">
-    <mc:Choice xmlns:p159="http://schemas.microsoft.com/office/powerpoint/2015/09/main" Requires="p159">
+  <mc:AlternateContent xmlns:mc="http://schemas.openxmlformats.org/markup-compatibility/2006" xmlns:p159="http://schemas.microsoft.com/office/powerpoint/2015/09/main">
+    <mc:Choice Requires="p159">
       <p:transition xmlns:p14="http://schemas.microsoft.com/office/powerpoint/2010/main" spd="slow" p14:dur="2000">
         <p159:morph option="byObject"/>
       </p:transition>
     </mc:Choice>
-    <mc:Fallback>
+    <mc:Fallback xmlns="">
       <p:transition spd="slow">
         <p:fade/>
       </p:transition>
@@ -7789,13 +7786,13 @@
   <p:clrMapOvr>
     <a:masterClrMapping/>
   </p:clrMapOvr>
-  <mc:AlternateContent xmlns:mc="http://schemas.openxmlformats.org/markup-compatibility/2006">
-    <mc:Choice xmlns:p159="http://schemas.microsoft.com/office/powerpoint/2015/09/main" Requires="p159">
+  <mc:AlternateContent xmlns:mc="http://schemas.openxmlformats.org/markup-compatibility/2006" xmlns:p159="http://schemas.microsoft.com/office/powerpoint/2015/09/main">
+    <mc:Choice Requires="p159">
       <p:transition xmlns:p14="http://schemas.microsoft.com/office/powerpoint/2010/main" spd="slow" p14:dur="2000">
         <p159:morph option="byObject"/>
       </p:transition>
     </mc:Choice>
-    <mc:Fallback>
+    <mc:Fallback xmlns="">
       <p:transition spd="slow">
         <p:fade/>
       </p:transition>
